--- a/Other/Intermediate Presentation.pptx
+++ b/Other/Intermediate Presentation.pptx
@@ -283,7 +283,7 @@
           <a:p>
             <a:fld id="{D429AE9B-288E-4BC6-928E-3E4952AE4ECD}" type="datetimeFigureOut">
               <a:rPr lang="en-US" smtClean="0"/>
-              <a:t>5/5/2026</a:t>
+              <a:t>6/22/2026</a:t>
             </a:fld>
             <a:endParaRPr lang="en-US"/>
           </a:p>
@@ -481,7 +481,7 @@
           <a:p>
             <a:fld id="{D429AE9B-288E-4BC6-928E-3E4952AE4ECD}" type="datetimeFigureOut">
               <a:rPr lang="en-US" smtClean="0"/>
-              <a:t>5/5/2026</a:t>
+              <a:t>6/22/2026</a:t>
             </a:fld>
             <a:endParaRPr lang="en-US"/>
           </a:p>
@@ -689,7 +689,7 @@
           <a:p>
             <a:fld id="{D429AE9B-288E-4BC6-928E-3E4952AE4ECD}" type="datetimeFigureOut">
               <a:rPr lang="en-US" smtClean="0"/>
-              <a:t>5/5/2026</a:t>
+              <a:t>6/22/2026</a:t>
             </a:fld>
             <a:endParaRPr lang="en-US"/>
           </a:p>
@@ -887,7 +887,7 @@
           <a:p>
             <a:fld id="{D429AE9B-288E-4BC6-928E-3E4952AE4ECD}" type="datetimeFigureOut">
               <a:rPr lang="en-US" smtClean="0"/>
-              <a:t>5/5/2026</a:t>
+              <a:t>6/22/2026</a:t>
             </a:fld>
             <a:endParaRPr lang="en-US"/>
           </a:p>
@@ -1162,7 +1162,7 @@
           <a:p>
             <a:fld id="{D429AE9B-288E-4BC6-928E-3E4952AE4ECD}" type="datetimeFigureOut">
               <a:rPr lang="en-US" smtClean="0"/>
-              <a:t>5/5/2026</a:t>
+              <a:t>6/22/2026</a:t>
             </a:fld>
             <a:endParaRPr lang="en-US"/>
           </a:p>
@@ -1427,7 +1427,7 @@
           <a:p>
             <a:fld id="{D429AE9B-288E-4BC6-928E-3E4952AE4ECD}" type="datetimeFigureOut">
               <a:rPr lang="en-US" smtClean="0"/>
-              <a:t>5/5/2026</a:t>
+              <a:t>6/22/2026</a:t>
             </a:fld>
             <a:endParaRPr lang="en-US"/>
           </a:p>
@@ -1839,7 +1839,7 @@
           <a:p>
             <a:fld id="{D429AE9B-288E-4BC6-928E-3E4952AE4ECD}" type="datetimeFigureOut">
               <a:rPr lang="en-US" smtClean="0"/>
-              <a:t>5/5/2026</a:t>
+              <a:t>6/22/2026</a:t>
             </a:fld>
             <a:endParaRPr lang="en-US"/>
           </a:p>
@@ -1980,7 +1980,7 @@
           <a:p>
             <a:fld id="{D429AE9B-288E-4BC6-928E-3E4952AE4ECD}" type="datetimeFigureOut">
               <a:rPr lang="en-US" smtClean="0"/>
-              <a:t>5/5/2026</a:t>
+              <a:t>6/22/2026</a:t>
             </a:fld>
             <a:endParaRPr lang="en-US"/>
           </a:p>
@@ -2093,7 +2093,7 @@
           <a:p>
             <a:fld id="{D429AE9B-288E-4BC6-928E-3E4952AE4ECD}" type="datetimeFigureOut">
               <a:rPr lang="en-US" smtClean="0"/>
-              <a:t>5/5/2026</a:t>
+              <a:t>6/22/2026</a:t>
             </a:fld>
             <a:endParaRPr lang="en-US"/>
           </a:p>
@@ -2404,7 +2404,7 @@
           <a:p>
             <a:fld id="{D429AE9B-288E-4BC6-928E-3E4952AE4ECD}" type="datetimeFigureOut">
               <a:rPr lang="en-US" smtClean="0"/>
-              <a:t>5/5/2026</a:t>
+              <a:t>6/22/2026</a:t>
             </a:fld>
             <a:endParaRPr lang="en-US"/>
           </a:p>
@@ -2692,7 +2692,7 @@
           <a:p>
             <a:fld id="{D429AE9B-288E-4BC6-928E-3E4952AE4ECD}" type="datetimeFigureOut">
               <a:rPr lang="en-US" smtClean="0"/>
-              <a:t>5/5/2026</a:t>
+              <a:t>6/22/2026</a:t>
             </a:fld>
             <a:endParaRPr lang="en-US"/>
           </a:p>
@@ -2933,7 +2933,7 @@
           <a:p>
             <a:fld id="{D429AE9B-288E-4BC6-928E-3E4952AE4ECD}" type="datetimeFigureOut">
               <a:rPr lang="en-US" smtClean="0"/>
-              <a:t>5/5/2026</a:t>
+              <a:t>6/22/2026</a:t>
             </a:fld>
             <a:endParaRPr lang="en-US"/>
           </a:p>
@@ -5298,13 +5298,7 @@
                             <a:rPr lang="en-US" sz="2400" i="1">
                               <a:latin typeface="Cambria Math" panose="02040503050406030204" pitchFamily="18" charset="0"/>
                             </a:rPr>
-                            <m:t>−</m:t>
-                          </m:r>
-                          <m:r>
-                            <a:rPr lang="en-US" sz="2400" i="1">
-                              <a:latin typeface="Cambria Math" panose="02040503050406030204" pitchFamily="18" charset="0"/>
-                            </a:rPr>
-                            <m:t>1</m:t>
+                            <m:t>−1</m:t>
                           </m:r>
                         </m:sub>
                       </m:sSub>
@@ -5366,13 +5360,7 @@
                             <a:rPr lang="en-US" sz="2400" i="1">
                               <a:latin typeface="Cambria Math" panose="02040503050406030204" pitchFamily="18" charset="0"/>
                             </a:rPr>
-                            <m:t>−</m:t>
-                          </m:r>
-                          <m:r>
-                            <a:rPr lang="en-US" sz="2400" i="1">
-                              <a:latin typeface="Cambria Math" panose="02040503050406030204" pitchFamily="18" charset="0"/>
-                            </a:rPr>
-                            <m:t>1</m:t>
+                            <m:t>−1</m:t>
                           </m:r>
                         </m:sub>
                       </m:sSub>
@@ -5611,13 +5599,7 @@
                             <a:rPr lang="fr-FR" sz="2400" i="1">
                               <a:latin typeface="Cambria Math" panose="02040503050406030204" pitchFamily="18" charset="0"/>
                             </a:rPr>
-                            <m:t>−</m:t>
-                          </m:r>
-                          <m:r>
-                            <a:rPr lang="fr-FR" sz="2400" i="1">
-                              <a:latin typeface="Cambria Math" panose="02040503050406030204" pitchFamily="18" charset="0"/>
-                            </a:rPr>
-                            <m:t>1</m:t>
+                            <m:t>−1</m:t>
                           </m:r>
                         </m:sub>
                       </m:sSub>
@@ -5679,13 +5661,7 @@
                             <a:rPr lang="fr-FR" sz="2400" i="1">
                               <a:latin typeface="Cambria Math" panose="02040503050406030204" pitchFamily="18" charset="0"/>
                             </a:rPr>
-                            <m:t>−</m:t>
-                          </m:r>
-                          <m:r>
-                            <a:rPr lang="fr-FR" sz="2400" i="1">
-                              <a:latin typeface="Cambria Math" panose="02040503050406030204" pitchFamily="18" charset="0"/>
-                            </a:rPr>
-                            <m:t>1</m:t>
+                            <m:t>−1</m:t>
                           </m:r>
                         </m:sub>
                       </m:sSub>
@@ -6200,13 +6176,7 @@
                                       <a:rPr lang="en-US" sz="2400" i="1">
                                         <a:latin typeface="Cambria Math" panose="02040503050406030204" pitchFamily="18" charset="0"/>
                                       </a:rPr>
-                                      <m:t>−</m:t>
-                                    </m:r>
-                                    <m:r>
-                                      <a:rPr lang="en-US" sz="2400" i="1">
-                                        <a:latin typeface="Cambria Math" panose="02040503050406030204" pitchFamily="18" charset="0"/>
-                                      </a:rPr>
-                                      <m:t>1</m:t>
+                                      <m:t>−1</m:t>
                                     </m:r>
                                   </m:sub>
                                 </m:sSub>
@@ -6241,13 +6211,7 @@
                                       <a:rPr lang="en-US" sz="2400" i="1">
                                         <a:latin typeface="Cambria Math" panose="02040503050406030204" pitchFamily="18" charset="0"/>
                                       </a:rPr>
-                                      <m:t>−</m:t>
-                                    </m:r>
-                                    <m:r>
-                                      <a:rPr lang="en-US" sz="2400" i="1">
-                                        <a:latin typeface="Cambria Math" panose="02040503050406030204" pitchFamily="18" charset="0"/>
-                                      </a:rPr>
-                                      <m:t>1</m:t>
+                                      <m:t>−1</m:t>
                                     </m:r>
                                   </m:sub>
                                 </m:sSub>
@@ -8789,932 +8753,6 @@
           <a:chExt cx="0" cy="0"/>
         </a:xfrm>
       </p:grpSpPr>
-      <p:pic>
-        <p:nvPicPr>
-          <p:cNvPr id="7" name="Picture 6">
-            <a:extLst>
-              <a:ext uri="{FF2B5EF4-FFF2-40B4-BE49-F238E27FC236}">
-                <a16:creationId xmlns:a16="http://schemas.microsoft.com/office/drawing/2014/main" id="{FD57B380-5106-CB18-A3EA-5EF9A2B335C7}"/>
-              </a:ext>
-            </a:extLst>
-          </p:cNvPr>
-          <p:cNvPicPr>
-            <a:picLocks noChangeAspect="1"/>
-          </p:cNvPicPr>
-          <p:nvPr/>
-        </p:nvPicPr>
-        <p:blipFill>
-          <a:blip r:embed="rId2"/>
-          <a:stretch>
-            <a:fillRect/>
-          </a:stretch>
-        </p:blipFill>
-        <p:spPr>
-          <a:xfrm>
-            <a:off x="0" y="0"/>
-            <a:ext cx="12192000" cy="6858000"/>
-          </a:xfrm>
-          <a:prstGeom prst="rect">
-            <a:avLst/>
-          </a:prstGeom>
-        </p:spPr>
-      </p:pic>
-      <p:pic>
-        <p:nvPicPr>
-          <p:cNvPr id="4" name="Picture 3">
-            <a:extLst>
-              <a:ext uri="{FF2B5EF4-FFF2-40B4-BE49-F238E27FC236}">
-                <a16:creationId xmlns:a16="http://schemas.microsoft.com/office/drawing/2014/main" id="{A1E9B553-792A-B2FB-847E-9FE4FE5C363C}"/>
-              </a:ext>
-            </a:extLst>
-          </p:cNvPr>
-          <p:cNvPicPr>
-            <a:picLocks noChangeAspect="1"/>
-          </p:cNvPicPr>
-          <p:nvPr/>
-        </p:nvPicPr>
-        <p:blipFill>
-          <a:blip r:embed="rId3">
-            <a:extLst>
-              <a:ext uri="{28A0092B-C50C-407E-A947-70E740481C1C}">
-                <a14:useLocalDpi xmlns:a14="http://schemas.microsoft.com/office/drawing/2010/main" val="0"/>
-              </a:ext>
-            </a:extLst>
-          </a:blip>
-          <a:stretch>
-            <a:fillRect/>
-          </a:stretch>
-        </p:blipFill>
-        <p:spPr>
-          <a:xfrm>
-            <a:off x="0" y="3437599"/>
-            <a:ext cx="2421564" cy="2274356"/>
-          </a:xfrm>
-          <a:prstGeom prst="rect">
-            <a:avLst/>
-          </a:prstGeom>
-        </p:spPr>
-      </p:pic>
-      <p:pic>
-        <p:nvPicPr>
-          <p:cNvPr id="6" name="Picture 5">
-            <a:extLst>
-              <a:ext uri="{FF2B5EF4-FFF2-40B4-BE49-F238E27FC236}">
-                <a16:creationId xmlns:a16="http://schemas.microsoft.com/office/drawing/2014/main" id="{0E2837DC-2CF0-3E49-1A37-6FE2FBF4A488}"/>
-              </a:ext>
-            </a:extLst>
-          </p:cNvPr>
-          <p:cNvPicPr>
-            <a:picLocks noChangeAspect="1"/>
-          </p:cNvPicPr>
-          <p:nvPr/>
-        </p:nvPicPr>
-        <p:blipFill>
-          <a:blip r:embed="rId4">
-            <a:extLst>
-              <a:ext uri="{28A0092B-C50C-407E-A947-70E740481C1C}">
-                <a14:useLocalDpi xmlns:a14="http://schemas.microsoft.com/office/drawing/2010/main" val="0"/>
-              </a:ext>
-            </a:extLst>
-          </a:blip>
-          <a:stretch>
-            <a:fillRect/>
-          </a:stretch>
-        </p:blipFill>
-        <p:spPr>
-          <a:xfrm>
-            <a:off x="4865596" y="3401688"/>
-            <a:ext cx="2421564" cy="2274356"/>
-          </a:xfrm>
-          <a:prstGeom prst="rect">
-            <a:avLst/>
-          </a:prstGeom>
-        </p:spPr>
-      </p:pic>
-      <p:pic>
-        <p:nvPicPr>
-          <p:cNvPr id="9" name="Picture 8">
-            <a:extLst>
-              <a:ext uri="{FF2B5EF4-FFF2-40B4-BE49-F238E27FC236}">
-                <a16:creationId xmlns:a16="http://schemas.microsoft.com/office/drawing/2014/main" id="{C033D10F-85CF-DB94-1A5E-75F68A9AF606}"/>
-              </a:ext>
-            </a:extLst>
-          </p:cNvPr>
-          <p:cNvPicPr>
-            <a:picLocks noChangeAspect="1"/>
-          </p:cNvPicPr>
-          <p:nvPr/>
-        </p:nvPicPr>
-        <p:blipFill>
-          <a:blip r:embed="rId5">
-            <a:extLst>
-              <a:ext uri="{28A0092B-C50C-407E-A947-70E740481C1C}">
-                <a14:useLocalDpi xmlns:a14="http://schemas.microsoft.com/office/drawing/2010/main" val="0"/>
-              </a:ext>
-            </a:extLst>
-          </a:blip>
-          <a:stretch>
-            <a:fillRect/>
-          </a:stretch>
-        </p:blipFill>
-        <p:spPr>
-          <a:xfrm>
-            <a:off x="2421563" y="3305615"/>
-            <a:ext cx="2466501" cy="2466501"/>
-          </a:xfrm>
-          <a:prstGeom prst="rect">
-            <a:avLst/>
-          </a:prstGeom>
-        </p:spPr>
-      </p:pic>
-      <p:pic>
-        <p:nvPicPr>
-          <p:cNvPr id="11" name="Picture 10">
-            <a:extLst>
-              <a:ext uri="{FF2B5EF4-FFF2-40B4-BE49-F238E27FC236}">
-                <a16:creationId xmlns:a16="http://schemas.microsoft.com/office/drawing/2014/main" id="{C05B2FC8-C7B6-E25F-7616-C1773ECBBB30}"/>
-              </a:ext>
-            </a:extLst>
-          </p:cNvPr>
-          <p:cNvPicPr>
-            <a:picLocks noChangeAspect="1"/>
-          </p:cNvPicPr>
-          <p:nvPr/>
-        </p:nvPicPr>
-        <p:blipFill>
-          <a:blip r:embed="rId6">
-            <a:extLst>
-              <a:ext uri="{28A0092B-C50C-407E-A947-70E740481C1C}">
-                <a14:useLocalDpi xmlns:a14="http://schemas.microsoft.com/office/drawing/2010/main" val="0"/>
-              </a:ext>
-            </a:extLst>
-          </a:blip>
-          <a:stretch>
-            <a:fillRect/>
-          </a:stretch>
-        </p:blipFill>
-        <p:spPr>
-          <a:xfrm>
-            <a:off x="7520790" y="3209543"/>
-            <a:ext cx="2466501" cy="2466501"/>
-          </a:xfrm>
-          <a:prstGeom prst="rect">
-            <a:avLst/>
-          </a:prstGeom>
-        </p:spPr>
-      </p:pic>
-      <p:pic>
-        <p:nvPicPr>
-          <p:cNvPr id="13" name="Picture 12">
-            <a:extLst>
-              <a:ext uri="{FF2B5EF4-FFF2-40B4-BE49-F238E27FC236}">
-                <a16:creationId xmlns:a16="http://schemas.microsoft.com/office/drawing/2014/main" id="{292DADEB-E945-307C-1598-0C15993FA03B}"/>
-              </a:ext>
-            </a:extLst>
-          </p:cNvPr>
-          <p:cNvPicPr>
-            <a:picLocks noChangeAspect="1"/>
-          </p:cNvPicPr>
-          <p:nvPr/>
-        </p:nvPicPr>
-        <p:blipFill>
-          <a:blip r:embed="rId7">
-            <a:extLst>
-              <a:ext uri="{28A0092B-C50C-407E-A947-70E740481C1C}">
-                <a14:useLocalDpi xmlns:a14="http://schemas.microsoft.com/office/drawing/2010/main" val="0"/>
-              </a:ext>
-            </a:extLst>
-          </a:blip>
-          <a:stretch>
-            <a:fillRect/>
-          </a:stretch>
-        </p:blipFill>
-        <p:spPr>
-          <a:xfrm>
-            <a:off x="9707440" y="3342521"/>
-            <a:ext cx="2484560" cy="2333523"/>
-          </a:xfrm>
-          <a:prstGeom prst="rect">
-            <a:avLst/>
-          </a:prstGeom>
-        </p:spPr>
-      </p:pic>
-      <p:sp>
-        <p:nvSpPr>
-          <p:cNvPr id="15" name="TextBox 14">
-            <a:extLst>
-              <a:ext uri="{FF2B5EF4-FFF2-40B4-BE49-F238E27FC236}">
-                <a16:creationId xmlns:a16="http://schemas.microsoft.com/office/drawing/2014/main" id="{1168DECA-42D9-CC4F-2A1B-51AF9293EDAC}"/>
-              </a:ext>
-            </a:extLst>
-          </p:cNvPr>
-          <p:cNvSpPr txBox="1"/>
-          <p:nvPr/>
-        </p:nvSpPr>
-        <p:spPr>
-          <a:xfrm>
-            <a:off x="7247262" y="4088850"/>
-            <a:ext cx="547055" cy="707886"/>
-          </a:xfrm>
-          <a:prstGeom prst="rect">
-            <a:avLst/>
-          </a:prstGeom>
-          <a:noFill/>
-        </p:spPr>
-        <p:txBody>
-          <a:bodyPr wrap="square" rtlCol="0">
-            <a:spAutoFit/>
-          </a:bodyPr>
-          <a:lstStyle/>
-          <a:p>
-            <a:r>
-              <a:rPr lang="en-US" sz="4000" dirty="0">
-                <a:latin typeface="Helvetica" panose="020B0604020202020204" pitchFamily="2" charset="0"/>
-              </a:rPr>
-              <a:t>x</a:t>
-            </a:r>
-          </a:p>
-        </p:txBody>
-      </p:sp>
-      <p:sp>
-        <p:nvSpPr>
-          <p:cNvPr id="16" name="TextBox 15">
-            <a:extLst>
-              <a:ext uri="{FF2B5EF4-FFF2-40B4-BE49-F238E27FC236}">
-                <a16:creationId xmlns:a16="http://schemas.microsoft.com/office/drawing/2014/main" id="{69F4E0FA-4254-22E8-4C67-51ADEAD767C9}"/>
-              </a:ext>
-            </a:extLst>
-          </p:cNvPr>
-          <p:cNvSpPr txBox="1"/>
-          <p:nvPr/>
-        </p:nvSpPr>
-        <p:spPr>
-          <a:xfrm>
-            <a:off x="4708884" y="4088850"/>
-            <a:ext cx="547055" cy="707886"/>
-          </a:xfrm>
-          <a:prstGeom prst="rect">
-            <a:avLst/>
-          </a:prstGeom>
-          <a:noFill/>
-        </p:spPr>
-        <p:txBody>
-          <a:bodyPr wrap="square" rtlCol="0">
-            <a:spAutoFit/>
-          </a:bodyPr>
-          <a:lstStyle/>
-          <a:p>
-            <a:r>
-              <a:rPr lang="en-US" sz="4000" dirty="0">
-                <a:latin typeface="Helvetica" panose="020B0604020202020204" pitchFamily="2" charset="0"/>
-              </a:rPr>
-              <a:t>x</a:t>
-            </a:r>
-          </a:p>
-        </p:txBody>
-      </p:sp>
-      <p:sp>
-        <p:nvSpPr>
-          <p:cNvPr id="17" name="TextBox 16">
-            <a:extLst>
-              <a:ext uri="{FF2B5EF4-FFF2-40B4-BE49-F238E27FC236}">
-                <a16:creationId xmlns:a16="http://schemas.microsoft.com/office/drawing/2014/main" id="{542E8C8A-7BD1-8788-BB3E-CE2F1201B2AA}"/>
-              </a:ext>
-            </a:extLst>
-          </p:cNvPr>
-          <p:cNvSpPr txBox="1"/>
-          <p:nvPr/>
-        </p:nvSpPr>
-        <p:spPr>
-          <a:xfrm>
-            <a:off x="2232870" y="4123366"/>
-            <a:ext cx="699012" cy="830997"/>
-          </a:xfrm>
-          <a:prstGeom prst="rect">
-            <a:avLst/>
-          </a:prstGeom>
-          <a:noFill/>
-        </p:spPr>
-        <p:txBody>
-          <a:bodyPr wrap="square" rtlCol="0">
-            <a:spAutoFit/>
-          </a:bodyPr>
-          <a:lstStyle/>
-          <a:p>
-            <a:r>
-              <a:rPr lang="en-US" sz="4800" dirty="0">
-                <a:latin typeface="Helvetica" panose="020B0604020202020204" pitchFamily="2" charset="0"/>
-              </a:rPr>
-              <a:t>=</a:t>
-            </a:r>
-          </a:p>
-        </p:txBody>
-      </p:sp>
-      <p:sp>
-        <p:nvSpPr>
-          <p:cNvPr id="18" name="TextBox 17">
-            <a:extLst>
-              <a:ext uri="{FF2B5EF4-FFF2-40B4-BE49-F238E27FC236}">
-                <a16:creationId xmlns:a16="http://schemas.microsoft.com/office/drawing/2014/main" id="{351F2B94-8679-D8F4-3411-2BDF9ED6F31E}"/>
-              </a:ext>
-            </a:extLst>
-          </p:cNvPr>
-          <p:cNvSpPr txBox="1"/>
-          <p:nvPr/>
-        </p:nvSpPr>
-        <p:spPr>
-          <a:xfrm>
-            <a:off x="9631461" y="4063206"/>
-            <a:ext cx="699012" cy="830997"/>
-          </a:xfrm>
-          <a:prstGeom prst="rect">
-            <a:avLst/>
-          </a:prstGeom>
-          <a:noFill/>
-        </p:spPr>
-        <p:txBody>
-          <a:bodyPr wrap="square" rtlCol="0">
-            <a:spAutoFit/>
-          </a:bodyPr>
-          <a:lstStyle/>
-          <a:p>
-            <a:r>
-              <a:rPr lang="en-US" sz="4800" dirty="0">
-                <a:latin typeface="Helvetica" panose="020B0604020202020204" pitchFamily="2" charset="0"/>
-              </a:rPr>
-              <a:t>+</a:t>
-            </a:r>
-          </a:p>
-        </p:txBody>
-      </p:sp>
-      <mc:AlternateContent xmlns:mc="http://schemas.openxmlformats.org/markup-compatibility/2006" xmlns:a14="http://schemas.microsoft.com/office/drawing/2010/main">
-        <mc:Choice Requires="a14">
-          <p:sp>
-            <p:nvSpPr>
-              <p:cNvPr id="20" name="TextBox 19">
-                <a:extLst>
-                  <a:ext uri="{FF2B5EF4-FFF2-40B4-BE49-F238E27FC236}">
-                    <a16:creationId xmlns:a16="http://schemas.microsoft.com/office/drawing/2014/main" id="{9E9739FD-D1E1-1C26-74C6-F7F9860CA259}"/>
-                  </a:ext>
-                </a:extLst>
-              </p:cNvPr>
-              <p:cNvSpPr txBox="1"/>
-              <p:nvPr/>
-            </p:nvSpPr>
-            <p:spPr>
-              <a:xfrm>
-                <a:off x="847337" y="5523712"/>
-                <a:ext cx="1095427" cy="615553"/>
-              </a:xfrm>
-              <a:prstGeom prst="rect">
-                <a:avLst/>
-              </a:prstGeom>
-              <a:noFill/>
-            </p:spPr>
-            <p:txBody>
-              <a:bodyPr wrap="square" lIns="0" tIns="0" rIns="0" bIns="0" rtlCol="0">
-                <a:spAutoFit/>
-              </a:bodyPr>
-              <a:lstStyle/>
-              <a:p>
-                <a:pPr/>
-                <a14:m>
-                  <m:oMathPara xmlns:m="http://schemas.openxmlformats.org/officeDocument/2006/math">
-                    <m:oMathParaPr>
-                      <m:jc m:val="centerGroup"/>
-                    </m:oMathParaPr>
-                    <m:oMath xmlns:m="http://schemas.openxmlformats.org/officeDocument/2006/math">
-                      <m:sSub>
-                        <m:sSubPr>
-                          <m:ctrlPr>
-                            <a:rPr lang="en-US" sz="4000" b="1" i="1" smtClean="0">
-                              <a:latin typeface="Cambria Math" panose="02040503050406030204" pitchFamily="18" charset="0"/>
-                            </a:rPr>
-                          </m:ctrlPr>
-                        </m:sSubPr>
-                        <m:e>
-                          <m:r>
-                            <a:rPr lang="en-US" sz="4000" b="1" i="1">
-                              <a:latin typeface="Cambria Math" panose="02040503050406030204" pitchFamily="18" charset="0"/>
-                            </a:rPr>
-                            <m:t>𝒀</m:t>
-                          </m:r>
-                        </m:e>
-                        <m:sub>
-                          <m:r>
-                            <a:rPr lang="en-US" sz="4000" b="1" i="1">
-                              <a:latin typeface="Cambria Math" panose="02040503050406030204" pitchFamily="18" charset="0"/>
-                            </a:rPr>
-                            <m:t>𝒕</m:t>
-                          </m:r>
-                        </m:sub>
-                      </m:sSub>
-                    </m:oMath>
-                  </m:oMathPara>
-                </a14:m>
-                <a:endParaRPr lang="en-US" sz="4000" b="1" dirty="0"/>
-              </a:p>
-            </p:txBody>
-          </p:sp>
-        </mc:Choice>
-        <mc:Fallback xmlns="">
-          <p:sp>
-            <p:nvSpPr>
-              <p:cNvPr id="20" name="TextBox 19">
-                <a:extLst>
-                  <a:ext uri="{FF2B5EF4-FFF2-40B4-BE49-F238E27FC236}">
-                    <a16:creationId xmlns:a16="http://schemas.microsoft.com/office/drawing/2014/main" id="{9E9739FD-D1E1-1C26-74C6-F7F9860CA259}"/>
-                  </a:ext>
-                </a:extLst>
-              </p:cNvPr>
-              <p:cNvSpPr txBox="1">
-                <a:spLocks noRot="1" noChangeAspect="1" noMove="1" noResize="1" noEditPoints="1" noAdjustHandles="1" noChangeArrowheads="1" noChangeShapeType="1" noTextEdit="1"/>
-              </p:cNvSpPr>
-              <p:nvPr/>
-            </p:nvSpPr>
-            <p:spPr>
-              <a:xfrm>
-                <a:off x="847337" y="5523712"/>
-                <a:ext cx="1095427" cy="615553"/>
-              </a:xfrm>
-              <a:prstGeom prst="rect">
-                <a:avLst/>
-              </a:prstGeom>
-              <a:blipFill>
-                <a:blip r:embed="rId8"/>
-                <a:stretch>
-                  <a:fillRect/>
-                </a:stretch>
-              </a:blipFill>
-            </p:spPr>
-            <p:txBody>
-              <a:bodyPr/>
-              <a:lstStyle/>
-              <a:p>
-                <a:r>
-                  <a:rPr lang="en-US">
-                    <a:noFill/>
-                  </a:rPr>
-                  <a:t> </a:t>
-                </a:r>
-              </a:p>
-            </p:txBody>
-          </p:sp>
-        </mc:Fallback>
-      </mc:AlternateContent>
-      <mc:AlternateContent xmlns:mc="http://schemas.openxmlformats.org/markup-compatibility/2006" xmlns:a14="http://schemas.microsoft.com/office/drawing/2010/main">
-        <mc:Choice Requires="a14">
-          <p:sp>
-            <p:nvSpPr>
-              <p:cNvPr id="21" name="TextBox 20">
-                <a:extLst>
-                  <a:ext uri="{FF2B5EF4-FFF2-40B4-BE49-F238E27FC236}">
-                    <a16:creationId xmlns:a16="http://schemas.microsoft.com/office/drawing/2014/main" id="{2F423A2B-434F-5DD0-5873-55F1A45CF182}"/>
-                  </a:ext>
-                </a:extLst>
-              </p:cNvPr>
-              <p:cNvSpPr txBox="1"/>
-              <p:nvPr/>
-            </p:nvSpPr>
-            <p:spPr>
-              <a:xfrm>
-                <a:off x="3270897" y="5487801"/>
-                <a:ext cx="778949" cy="615553"/>
-              </a:xfrm>
-              <a:prstGeom prst="rect">
-                <a:avLst/>
-              </a:prstGeom>
-              <a:noFill/>
-            </p:spPr>
-            <p:txBody>
-              <a:bodyPr wrap="square" lIns="0" tIns="0" rIns="0" bIns="0" rtlCol="0">
-                <a:spAutoFit/>
-              </a:bodyPr>
-              <a:lstStyle/>
-              <a:p>
-                <a:pPr/>
-                <a14:m>
-                  <m:oMathPara xmlns:m="http://schemas.openxmlformats.org/officeDocument/2006/math">
-                    <m:oMathParaPr>
-                      <m:jc m:val="centerGroup"/>
-                    </m:oMathParaPr>
-                    <m:oMath xmlns:m="http://schemas.openxmlformats.org/officeDocument/2006/math">
-                      <m:r>
-                        <a:rPr lang="en-US" sz="4000" b="1" i="1">
-                          <a:latin typeface="Cambria Math" panose="02040503050406030204" pitchFamily="18" charset="0"/>
-                        </a:rPr>
-                        <m:t>𝑨</m:t>
-                      </m:r>
-                    </m:oMath>
-                  </m:oMathPara>
-                </a14:m>
-                <a:endParaRPr lang="en-US" sz="4000" b="1" dirty="0"/>
-              </a:p>
-            </p:txBody>
-          </p:sp>
-        </mc:Choice>
-        <mc:Fallback xmlns="">
-          <p:sp>
-            <p:nvSpPr>
-              <p:cNvPr id="21" name="TextBox 20">
-                <a:extLst>
-                  <a:ext uri="{FF2B5EF4-FFF2-40B4-BE49-F238E27FC236}">
-                    <a16:creationId xmlns:a16="http://schemas.microsoft.com/office/drawing/2014/main" id="{2F423A2B-434F-5DD0-5873-55F1A45CF182}"/>
-                  </a:ext>
-                </a:extLst>
-              </p:cNvPr>
-              <p:cNvSpPr txBox="1">
-                <a:spLocks noRot="1" noChangeAspect="1" noMove="1" noResize="1" noEditPoints="1" noAdjustHandles="1" noChangeArrowheads="1" noChangeShapeType="1" noTextEdit="1"/>
-              </p:cNvSpPr>
-              <p:nvPr/>
-            </p:nvSpPr>
-            <p:spPr>
-              <a:xfrm>
-                <a:off x="3270897" y="5487801"/>
-                <a:ext cx="778949" cy="615553"/>
-              </a:xfrm>
-              <a:prstGeom prst="rect">
-                <a:avLst/>
-              </a:prstGeom>
-              <a:blipFill>
-                <a:blip r:embed="rId9"/>
-                <a:stretch>
-                  <a:fillRect/>
-                </a:stretch>
-              </a:blipFill>
-            </p:spPr>
-            <p:txBody>
-              <a:bodyPr/>
-              <a:lstStyle/>
-              <a:p>
-                <a:r>
-                  <a:rPr lang="en-US">
-                    <a:noFill/>
-                  </a:rPr>
-                  <a:t> </a:t>
-                </a:r>
-              </a:p>
-            </p:txBody>
-          </p:sp>
-        </mc:Fallback>
-      </mc:AlternateContent>
-      <mc:AlternateContent xmlns:mc="http://schemas.openxmlformats.org/markup-compatibility/2006" xmlns:a14="http://schemas.microsoft.com/office/drawing/2010/main">
-        <mc:Choice Requires="a14">
-          <p:sp>
-            <p:nvSpPr>
-              <p:cNvPr id="22" name="TextBox 21">
-                <a:extLst>
-                  <a:ext uri="{FF2B5EF4-FFF2-40B4-BE49-F238E27FC236}">
-                    <a16:creationId xmlns:a16="http://schemas.microsoft.com/office/drawing/2014/main" id="{B2887679-58D3-5CA7-E554-F05E3D91F746}"/>
-                  </a:ext>
-                </a:extLst>
-              </p:cNvPr>
-              <p:cNvSpPr txBox="1"/>
-              <p:nvPr/>
-            </p:nvSpPr>
-            <p:spPr>
-              <a:xfrm>
-                <a:off x="5693398" y="5487801"/>
-                <a:ext cx="1285144" cy="615553"/>
-              </a:xfrm>
-              <a:prstGeom prst="rect">
-                <a:avLst/>
-              </a:prstGeom>
-              <a:noFill/>
-            </p:spPr>
-            <p:txBody>
-              <a:bodyPr wrap="square" lIns="0" tIns="0" rIns="0" bIns="0" rtlCol="0">
-                <a:spAutoFit/>
-              </a:bodyPr>
-              <a:lstStyle/>
-              <a:p>
-                <a:pPr/>
-                <a14:m>
-                  <m:oMathPara xmlns:m="http://schemas.openxmlformats.org/officeDocument/2006/math">
-                    <m:oMathParaPr>
-                      <m:jc m:val="centerGroup"/>
-                    </m:oMathParaPr>
-                    <m:oMath xmlns:m="http://schemas.openxmlformats.org/officeDocument/2006/math">
-                      <m:sSub>
-                        <m:sSubPr>
-                          <m:ctrlPr>
-                            <a:rPr lang="en-US" sz="4000" b="1" i="1">
-                              <a:latin typeface="Cambria Math" panose="02040503050406030204" pitchFamily="18" charset="0"/>
-                            </a:rPr>
-                          </m:ctrlPr>
-                        </m:sSubPr>
-                        <m:e>
-                          <m:r>
-                            <a:rPr lang="en-US" sz="4000" b="1" i="1">
-                              <a:latin typeface="Cambria Math" panose="02040503050406030204" pitchFamily="18" charset="0"/>
-                            </a:rPr>
-                            <m:t>𝒀</m:t>
-                          </m:r>
-                        </m:e>
-                        <m:sub>
-                          <m:r>
-                            <a:rPr lang="en-US" sz="4000" b="1" i="1">
-                              <a:latin typeface="Cambria Math" panose="02040503050406030204" pitchFamily="18" charset="0"/>
-                            </a:rPr>
-                            <m:t>𝒕</m:t>
-                          </m:r>
-                          <m:r>
-                            <a:rPr lang="en-US" sz="4000" b="1" i="1">
-                              <a:latin typeface="Cambria Math" panose="02040503050406030204" pitchFamily="18" charset="0"/>
-                            </a:rPr>
-                            <m:t>−</m:t>
-                          </m:r>
-                          <m:r>
-                            <a:rPr lang="en-US" sz="4000" b="1" i="1">
-                              <a:latin typeface="Cambria Math" panose="02040503050406030204" pitchFamily="18" charset="0"/>
-                            </a:rPr>
-                            <m:t>𝟏</m:t>
-                          </m:r>
-                        </m:sub>
-                      </m:sSub>
-                    </m:oMath>
-                  </m:oMathPara>
-                </a14:m>
-                <a:endParaRPr lang="en-US" sz="4000" b="1" dirty="0"/>
-              </a:p>
-            </p:txBody>
-          </p:sp>
-        </mc:Choice>
-        <mc:Fallback xmlns="">
-          <p:sp>
-            <p:nvSpPr>
-              <p:cNvPr id="22" name="TextBox 21">
-                <a:extLst>
-                  <a:ext uri="{FF2B5EF4-FFF2-40B4-BE49-F238E27FC236}">
-                    <a16:creationId xmlns:a16="http://schemas.microsoft.com/office/drawing/2014/main" id="{B2887679-58D3-5CA7-E554-F05E3D91F746}"/>
-                  </a:ext>
-                </a:extLst>
-              </p:cNvPr>
-              <p:cNvSpPr txBox="1">
-                <a:spLocks noRot="1" noChangeAspect="1" noMove="1" noResize="1" noEditPoints="1" noAdjustHandles="1" noChangeArrowheads="1" noChangeShapeType="1" noTextEdit="1"/>
-              </p:cNvSpPr>
-              <p:nvPr/>
-            </p:nvSpPr>
-            <p:spPr>
-              <a:xfrm>
-                <a:off x="5693398" y="5487801"/>
-                <a:ext cx="1285144" cy="615553"/>
-              </a:xfrm>
-              <a:prstGeom prst="rect">
-                <a:avLst/>
-              </a:prstGeom>
-              <a:blipFill>
-                <a:blip r:embed="rId10"/>
-                <a:stretch>
-                  <a:fillRect/>
-                </a:stretch>
-              </a:blipFill>
-            </p:spPr>
-            <p:txBody>
-              <a:bodyPr/>
-              <a:lstStyle/>
-              <a:p>
-                <a:r>
-                  <a:rPr lang="en-US">
-                    <a:noFill/>
-                  </a:rPr>
-                  <a:t> </a:t>
-                </a:r>
-              </a:p>
-            </p:txBody>
-          </p:sp>
-        </mc:Fallback>
-      </mc:AlternateContent>
-      <mc:AlternateContent xmlns:mc="http://schemas.openxmlformats.org/markup-compatibility/2006" xmlns:a14="http://schemas.microsoft.com/office/drawing/2010/main">
-        <mc:Choice Requires="a14">
-          <p:sp>
-            <p:nvSpPr>
-              <p:cNvPr id="23" name="TextBox 22">
-                <a:extLst>
-                  <a:ext uri="{FF2B5EF4-FFF2-40B4-BE49-F238E27FC236}">
-                    <a16:creationId xmlns:a16="http://schemas.microsoft.com/office/drawing/2014/main" id="{6F3E68F4-F52E-27F8-0926-29005D1D7313}"/>
-                  </a:ext>
-                </a:extLst>
-              </p:cNvPr>
-              <p:cNvSpPr txBox="1"/>
-              <p:nvPr/>
-            </p:nvSpPr>
-            <p:spPr>
-              <a:xfrm>
-                <a:off x="8421304" y="5473192"/>
-                <a:ext cx="838415" cy="615553"/>
-              </a:xfrm>
-              <a:prstGeom prst="rect">
-                <a:avLst/>
-              </a:prstGeom>
-              <a:noFill/>
-            </p:spPr>
-            <p:txBody>
-              <a:bodyPr wrap="square" lIns="0" tIns="0" rIns="0" bIns="0" rtlCol="0">
-                <a:spAutoFit/>
-              </a:bodyPr>
-              <a:lstStyle/>
-              <a:p>
-                <a:pPr/>
-                <a14:m>
-                  <m:oMathPara xmlns:m="http://schemas.openxmlformats.org/officeDocument/2006/math">
-                    <m:oMathParaPr>
-                      <m:jc m:val="centerGroup"/>
-                    </m:oMathParaPr>
-                    <m:oMath xmlns:m="http://schemas.openxmlformats.org/officeDocument/2006/math">
-                      <m:sSup>
-                        <m:sSupPr>
-                          <m:ctrlPr>
-                            <a:rPr lang="en-US" sz="4000" b="1" i="1">
-                              <a:latin typeface="Cambria Math" panose="02040503050406030204" pitchFamily="18" charset="0"/>
-                            </a:rPr>
-                          </m:ctrlPr>
-                        </m:sSupPr>
-                        <m:e>
-                          <m:r>
-                            <a:rPr lang="en-US" sz="4000" b="1" i="1">
-                              <a:latin typeface="Cambria Math" panose="02040503050406030204" pitchFamily="18" charset="0"/>
-                            </a:rPr>
-                            <m:t>𝑩</m:t>
-                          </m:r>
-                        </m:e>
-                        <m:sup>
-                          <m:r>
-                            <a:rPr lang="en-US" sz="4000" b="1" i="1">
-                              <a:latin typeface="Cambria Math" panose="02040503050406030204" pitchFamily="18" charset="0"/>
-                            </a:rPr>
-                            <m:t>′</m:t>
-                          </m:r>
-                        </m:sup>
-                      </m:sSup>
-                    </m:oMath>
-                  </m:oMathPara>
-                </a14:m>
-                <a:endParaRPr lang="en-US" sz="4000" b="1" dirty="0"/>
-              </a:p>
-            </p:txBody>
-          </p:sp>
-        </mc:Choice>
-        <mc:Fallback xmlns="">
-          <p:sp>
-            <p:nvSpPr>
-              <p:cNvPr id="23" name="TextBox 22">
-                <a:extLst>
-                  <a:ext uri="{FF2B5EF4-FFF2-40B4-BE49-F238E27FC236}">
-                    <a16:creationId xmlns:a16="http://schemas.microsoft.com/office/drawing/2014/main" id="{6F3E68F4-F52E-27F8-0926-29005D1D7313}"/>
-                  </a:ext>
-                </a:extLst>
-              </p:cNvPr>
-              <p:cNvSpPr txBox="1">
-                <a:spLocks noRot="1" noChangeAspect="1" noMove="1" noResize="1" noEditPoints="1" noAdjustHandles="1" noChangeArrowheads="1" noChangeShapeType="1" noTextEdit="1"/>
-              </p:cNvSpPr>
-              <p:nvPr/>
-            </p:nvSpPr>
-            <p:spPr>
-              <a:xfrm>
-                <a:off x="8421304" y="5473192"/>
-                <a:ext cx="838415" cy="615553"/>
-              </a:xfrm>
-              <a:prstGeom prst="rect">
-                <a:avLst/>
-              </a:prstGeom>
-              <a:blipFill>
-                <a:blip r:embed="rId11"/>
-                <a:stretch>
-                  <a:fillRect/>
-                </a:stretch>
-              </a:blipFill>
-            </p:spPr>
-            <p:txBody>
-              <a:bodyPr/>
-              <a:lstStyle/>
-              <a:p>
-                <a:r>
-                  <a:rPr lang="en-US">
-                    <a:noFill/>
-                  </a:rPr>
-                  <a:t> </a:t>
-                </a:r>
-              </a:p>
-            </p:txBody>
-          </p:sp>
-        </mc:Fallback>
-      </mc:AlternateContent>
-      <mc:AlternateContent xmlns:mc="http://schemas.openxmlformats.org/markup-compatibility/2006" xmlns:a14="http://schemas.microsoft.com/office/drawing/2010/main">
-        <mc:Choice Requires="a14">
-          <p:sp>
-            <p:nvSpPr>
-              <p:cNvPr id="24" name="TextBox 23">
-                <a:extLst>
-                  <a:ext uri="{FF2B5EF4-FFF2-40B4-BE49-F238E27FC236}">
-                    <a16:creationId xmlns:a16="http://schemas.microsoft.com/office/drawing/2014/main" id="{BACC8BD1-EE02-BFA7-D713-E026F877D29F}"/>
-                  </a:ext>
-                </a:extLst>
-              </p:cNvPr>
-              <p:cNvSpPr txBox="1"/>
-              <p:nvPr/>
-            </p:nvSpPr>
-            <p:spPr>
-              <a:xfrm>
-                <a:off x="10702481" y="5457721"/>
-                <a:ext cx="841771" cy="615553"/>
-              </a:xfrm>
-              <a:prstGeom prst="rect">
-                <a:avLst/>
-              </a:prstGeom>
-              <a:noFill/>
-            </p:spPr>
-            <p:txBody>
-              <a:bodyPr wrap="square" lIns="0" tIns="0" rIns="0" bIns="0" rtlCol="0">
-                <a:spAutoFit/>
-              </a:bodyPr>
-              <a:lstStyle/>
-              <a:p>
-                <a:pPr/>
-                <a14:m>
-                  <m:oMathPara xmlns:m="http://schemas.openxmlformats.org/officeDocument/2006/math">
-                    <m:oMathParaPr>
-                      <m:jc m:val="centerGroup"/>
-                    </m:oMathParaPr>
-                    <m:oMath xmlns:m="http://schemas.openxmlformats.org/officeDocument/2006/math">
-                      <m:sSub>
-                        <m:sSubPr>
-                          <m:ctrlPr>
-                            <a:rPr lang="en-US" sz="4000" b="1" i="1" smtClean="0">
-                              <a:latin typeface="Cambria Math" panose="02040503050406030204" pitchFamily="18" charset="0"/>
-                            </a:rPr>
-                          </m:ctrlPr>
-                        </m:sSubPr>
-                        <m:e>
-                          <m:r>
-                            <a:rPr lang="en-US" sz="4000" b="1" i="1">
-                              <a:latin typeface="Cambria Math" panose="02040503050406030204" pitchFamily="18" charset="0"/>
-                            </a:rPr>
-                            <m:t>𝑬</m:t>
-                          </m:r>
-                        </m:e>
-                        <m:sub>
-                          <m:r>
-                            <a:rPr lang="en-US" sz="4000" b="1" i="1">
-                              <a:latin typeface="Cambria Math" panose="02040503050406030204" pitchFamily="18" charset="0"/>
-                            </a:rPr>
-                            <m:t>𝒕</m:t>
-                          </m:r>
-                        </m:sub>
-                      </m:sSub>
-                    </m:oMath>
-                  </m:oMathPara>
-                </a14:m>
-                <a:endParaRPr lang="en-US" sz="4000" b="1" dirty="0"/>
-              </a:p>
-            </p:txBody>
-          </p:sp>
-        </mc:Choice>
-        <mc:Fallback xmlns="">
-          <p:sp>
-            <p:nvSpPr>
-              <p:cNvPr id="24" name="TextBox 23">
-                <a:extLst>
-                  <a:ext uri="{FF2B5EF4-FFF2-40B4-BE49-F238E27FC236}">
-                    <a16:creationId xmlns:a16="http://schemas.microsoft.com/office/drawing/2014/main" id="{BACC8BD1-EE02-BFA7-D713-E026F877D29F}"/>
-                  </a:ext>
-                </a:extLst>
-              </p:cNvPr>
-              <p:cNvSpPr txBox="1">
-                <a:spLocks noRot="1" noChangeAspect="1" noMove="1" noResize="1" noEditPoints="1" noAdjustHandles="1" noChangeArrowheads="1" noChangeShapeType="1" noTextEdit="1"/>
-              </p:cNvSpPr>
-              <p:nvPr/>
-            </p:nvSpPr>
-            <p:spPr>
-              <a:xfrm>
-                <a:off x="10702481" y="5457721"/>
-                <a:ext cx="841771" cy="615553"/>
-              </a:xfrm>
-              <a:prstGeom prst="rect">
-                <a:avLst/>
-              </a:prstGeom>
-              <a:blipFill>
-                <a:blip r:embed="rId12"/>
-                <a:stretch>
-                  <a:fillRect/>
-                </a:stretch>
-              </a:blipFill>
-            </p:spPr>
-            <p:txBody>
-              <a:bodyPr/>
-              <a:lstStyle/>
-              <a:p>
-                <a:r>
-                  <a:rPr lang="en-US">
-                    <a:noFill/>
-                  </a:rPr>
-                  <a:t> </a:t>
-                </a:r>
-              </a:p>
-            </p:txBody>
-          </p:sp>
-        </mc:Fallback>
-      </mc:AlternateContent>
       <p:sp>
         <p:nvSpPr>
           <p:cNvPr id="10" name="Title 1">
@@ -9894,6 +8932,902 @@
               <a:p>
                 <a:r>
                   <a:rPr lang="en-US">
+                    <a:noFill/>
+                  </a:rPr>
+                  <a:t> </a:t>
+                </a:r>
+              </a:p>
+            </p:txBody>
+          </p:sp>
+        </mc:Fallback>
+      </mc:AlternateContent>
+      <p:pic>
+        <p:nvPicPr>
+          <p:cNvPr id="3" name="Picture 2">
+            <a:extLst>
+              <a:ext uri="{FF2B5EF4-FFF2-40B4-BE49-F238E27FC236}">
+                <a16:creationId xmlns:a16="http://schemas.microsoft.com/office/drawing/2014/main" id="{71BB434C-5499-F331-EEDB-ABB33F0624C2}"/>
+              </a:ext>
+            </a:extLst>
+          </p:cNvPr>
+          <p:cNvPicPr>
+            <a:picLocks noChangeAspect="1"/>
+          </p:cNvPicPr>
+          <p:nvPr/>
+        </p:nvPicPr>
+        <p:blipFill>
+          <a:blip r:embed="rId14">
+            <a:extLst>
+              <a:ext uri="{28A0092B-C50C-407E-A947-70E740481C1C}">
+                <a14:useLocalDpi xmlns:a14="http://schemas.microsoft.com/office/drawing/2010/main" val="0"/>
+              </a:ext>
+            </a:extLst>
+          </a:blip>
+          <a:stretch>
+            <a:fillRect/>
+          </a:stretch>
+        </p:blipFill>
+        <p:spPr>
+          <a:xfrm>
+            <a:off x="-248348" y="3378232"/>
+            <a:ext cx="2613871" cy="2480511"/>
+          </a:xfrm>
+          <a:prstGeom prst="rect">
+            <a:avLst/>
+          </a:prstGeom>
+        </p:spPr>
+      </p:pic>
+      <p:pic>
+        <p:nvPicPr>
+          <p:cNvPr id="8" name="Picture 7">
+            <a:extLst>
+              <a:ext uri="{FF2B5EF4-FFF2-40B4-BE49-F238E27FC236}">
+                <a16:creationId xmlns:a16="http://schemas.microsoft.com/office/drawing/2014/main" id="{E05FF539-9A49-74B2-E1C5-AE60128FA881}"/>
+              </a:ext>
+            </a:extLst>
+          </p:cNvPr>
+          <p:cNvPicPr>
+            <a:picLocks noChangeAspect="1"/>
+          </p:cNvPicPr>
+          <p:nvPr/>
+        </p:nvPicPr>
+        <p:blipFill>
+          <a:blip r:embed="rId15">
+            <a:extLst>
+              <a:ext uri="{28A0092B-C50C-407E-A947-70E740481C1C}">
+                <a14:useLocalDpi xmlns:a14="http://schemas.microsoft.com/office/drawing/2010/main" val="0"/>
+              </a:ext>
+            </a:extLst>
+          </a:blip>
+          <a:stretch>
+            <a:fillRect/>
+          </a:stretch>
+        </p:blipFill>
+        <p:spPr>
+          <a:xfrm>
+            <a:off x="4639132" y="3382265"/>
+            <a:ext cx="2609621" cy="2476477"/>
+          </a:xfrm>
+          <a:prstGeom prst="rect">
+            <a:avLst/>
+          </a:prstGeom>
+        </p:spPr>
+      </p:pic>
+      <p:pic>
+        <p:nvPicPr>
+          <p:cNvPr id="11" name="Picture 10">
+            <a:extLst>
+              <a:ext uri="{FF2B5EF4-FFF2-40B4-BE49-F238E27FC236}">
+                <a16:creationId xmlns:a16="http://schemas.microsoft.com/office/drawing/2014/main" id="{249BFC0F-0E40-CEBE-B433-43721B748C93}"/>
+              </a:ext>
+            </a:extLst>
+          </p:cNvPr>
+          <p:cNvPicPr>
+            <a:picLocks noChangeAspect="1"/>
+          </p:cNvPicPr>
+          <p:nvPr/>
+        </p:nvPicPr>
+        <p:blipFill>
+          <a:blip r:embed="rId16">
+            <a:extLst>
+              <a:ext uri="{28A0092B-C50C-407E-A947-70E740481C1C}">
+                <a14:useLocalDpi xmlns:a14="http://schemas.microsoft.com/office/drawing/2010/main" val="0"/>
+              </a:ext>
+            </a:extLst>
+          </a:blip>
+          <a:stretch>
+            <a:fillRect/>
+          </a:stretch>
+        </p:blipFill>
+        <p:spPr>
+          <a:xfrm>
+            <a:off x="7208062" y="3289361"/>
+            <a:ext cx="2569382" cy="2569382"/>
+          </a:xfrm>
+          <a:prstGeom prst="rect">
+            <a:avLst/>
+          </a:prstGeom>
+        </p:spPr>
+      </p:pic>
+      <p:pic>
+        <p:nvPicPr>
+          <p:cNvPr id="13" name="Picture 12">
+            <a:extLst>
+              <a:ext uri="{FF2B5EF4-FFF2-40B4-BE49-F238E27FC236}">
+                <a16:creationId xmlns:a16="http://schemas.microsoft.com/office/drawing/2014/main" id="{35A6ADF5-EB34-7657-E69D-B72824C8B8EC}"/>
+              </a:ext>
+            </a:extLst>
+          </p:cNvPr>
+          <p:cNvPicPr>
+            <a:picLocks noChangeAspect="1"/>
+          </p:cNvPicPr>
+          <p:nvPr/>
+        </p:nvPicPr>
+        <p:blipFill>
+          <a:blip r:embed="rId17">
+            <a:extLst>
+              <a:ext uri="{28A0092B-C50C-407E-A947-70E740481C1C}">
+                <a14:useLocalDpi xmlns:a14="http://schemas.microsoft.com/office/drawing/2010/main" val="0"/>
+              </a:ext>
+            </a:extLst>
+          </a:blip>
+          <a:stretch>
+            <a:fillRect/>
+          </a:stretch>
+        </p:blipFill>
+        <p:spPr>
+          <a:xfrm>
+            <a:off x="9521910" y="3382265"/>
+            <a:ext cx="2609621" cy="2476477"/>
+          </a:xfrm>
+          <a:prstGeom prst="rect">
+            <a:avLst/>
+          </a:prstGeom>
+        </p:spPr>
+      </p:pic>
+      <p:sp>
+        <p:nvSpPr>
+          <p:cNvPr id="15" name="TextBox 14">
+            <a:extLst>
+              <a:ext uri="{FF2B5EF4-FFF2-40B4-BE49-F238E27FC236}">
+                <a16:creationId xmlns:a16="http://schemas.microsoft.com/office/drawing/2014/main" id="{1168DECA-42D9-CC4F-2A1B-51AF9293EDAC}"/>
+              </a:ext>
+            </a:extLst>
+          </p:cNvPr>
+          <p:cNvSpPr txBox="1"/>
+          <p:nvPr/>
+        </p:nvSpPr>
+        <p:spPr>
+          <a:xfrm>
+            <a:off x="7045715" y="4173728"/>
+            <a:ext cx="547055" cy="707886"/>
+          </a:xfrm>
+          <a:prstGeom prst="rect">
+            <a:avLst/>
+          </a:prstGeom>
+          <a:noFill/>
+        </p:spPr>
+        <p:txBody>
+          <a:bodyPr wrap="square" rtlCol="0">
+            <a:spAutoFit/>
+          </a:bodyPr>
+          <a:lstStyle/>
+          <a:p>
+            <a:r>
+              <a:rPr lang="en-US" sz="4000" dirty="0">
+                <a:latin typeface="Helvetica" panose="020B0604020202020204" pitchFamily="2" charset="0"/>
+              </a:rPr>
+              <a:t>x</a:t>
+            </a:r>
+          </a:p>
+        </p:txBody>
+      </p:sp>
+      <p:sp>
+        <p:nvSpPr>
+          <p:cNvPr id="18" name="TextBox 17">
+            <a:extLst>
+              <a:ext uri="{FF2B5EF4-FFF2-40B4-BE49-F238E27FC236}">
+                <a16:creationId xmlns:a16="http://schemas.microsoft.com/office/drawing/2014/main" id="{351F2B94-8679-D8F4-3411-2BDF9ED6F31E}"/>
+              </a:ext>
+            </a:extLst>
+          </p:cNvPr>
+          <p:cNvSpPr txBox="1"/>
+          <p:nvPr/>
+        </p:nvSpPr>
+        <p:spPr>
+          <a:xfrm>
+            <a:off x="9452298" y="4127862"/>
+            <a:ext cx="699012" cy="830997"/>
+          </a:xfrm>
+          <a:prstGeom prst="rect">
+            <a:avLst/>
+          </a:prstGeom>
+          <a:noFill/>
+        </p:spPr>
+        <p:txBody>
+          <a:bodyPr wrap="square" rtlCol="0">
+            <a:spAutoFit/>
+          </a:bodyPr>
+          <a:lstStyle/>
+          <a:p>
+            <a:r>
+              <a:rPr lang="en-US" sz="4800" dirty="0">
+                <a:latin typeface="Helvetica" panose="020B0604020202020204" pitchFamily="2" charset="0"/>
+              </a:rPr>
+              <a:t>+</a:t>
+            </a:r>
+          </a:p>
+        </p:txBody>
+      </p:sp>
+      <mc:AlternateContent xmlns:mc="http://schemas.openxmlformats.org/markup-compatibility/2006" xmlns:a14="http://schemas.microsoft.com/office/drawing/2010/main">
+        <mc:Choice Requires="a14">
+          <p:sp>
+            <p:nvSpPr>
+              <p:cNvPr id="20" name="TextBox 19">
+                <a:extLst>
+                  <a:ext uri="{FF2B5EF4-FFF2-40B4-BE49-F238E27FC236}">
+                    <a16:creationId xmlns:a16="http://schemas.microsoft.com/office/drawing/2014/main" id="{9E9739FD-D1E1-1C26-74C6-F7F9860CA259}"/>
+                  </a:ext>
+                </a:extLst>
+              </p:cNvPr>
+              <p:cNvSpPr txBox="1"/>
+              <p:nvPr/>
+            </p:nvSpPr>
+            <p:spPr>
+              <a:xfrm>
+                <a:off x="725168" y="5637524"/>
+                <a:ext cx="1095427" cy="615553"/>
+              </a:xfrm>
+              <a:prstGeom prst="rect">
+                <a:avLst/>
+              </a:prstGeom>
+              <a:noFill/>
+            </p:spPr>
+            <p:txBody>
+              <a:bodyPr wrap="square" lIns="0" tIns="0" rIns="0" bIns="0" rtlCol="0">
+                <a:spAutoFit/>
+              </a:bodyPr>
+              <a:lstStyle/>
+              <a:p>
+                <a:pPr/>
+                <a14:m>
+                  <m:oMathPara xmlns:m="http://schemas.openxmlformats.org/officeDocument/2006/math">
+                    <m:oMathParaPr>
+                      <m:jc m:val="centerGroup"/>
+                    </m:oMathParaPr>
+                    <m:oMath xmlns:m="http://schemas.openxmlformats.org/officeDocument/2006/math">
+                      <m:sSub>
+                        <m:sSubPr>
+                          <m:ctrlPr>
+                            <a:rPr lang="en-US" sz="4000" b="1" i="1" smtClean="0">
+                              <a:latin typeface="Cambria Math" panose="02040503050406030204" pitchFamily="18" charset="0"/>
+                            </a:rPr>
+                          </m:ctrlPr>
+                        </m:sSubPr>
+                        <m:e>
+                          <m:r>
+                            <a:rPr lang="en-US" sz="4000" b="1" i="1" smtClean="0">
+                              <a:latin typeface="Cambria Math" panose="02040503050406030204" pitchFamily="18" charset="0"/>
+                            </a:rPr>
+                            <m:t>𝑿</m:t>
+                          </m:r>
+                        </m:e>
+                        <m:sub>
+                          <m:r>
+                            <a:rPr lang="en-US" sz="4000" b="1" i="1">
+                              <a:latin typeface="Cambria Math" panose="02040503050406030204" pitchFamily="18" charset="0"/>
+                            </a:rPr>
+                            <m:t>𝒕</m:t>
+                          </m:r>
+                        </m:sub>
+                      </m:sSub>
+                    </m:oMath>
+                  </m:oMathPara>
+                </a14:m>
+                <a:endParaRPr lang="en-US" sz="4000" b="1" dirty="0"/>
+              </a:p>
+            </p:txBody>
+          </p:sp>
+        </mc:Choice>
+        <mc:Fallback xmlns="">
+          <p:sp>
+            <p:nvSpPr>
+              <p:cNvPr id="20" name="TextBox 19">
+                <a:extLst>
+                  <a:ext uri="{FF2B5EF4-FFF2-40B4-BE49-F238E27FC236}">
+                    <a16:creationId xmlns:a16="http://schemas.microsoft.com/office/drawing/2014/main" id="{9E9739FD-D1E1-1C26-74C6-F7F9860CA259}"/>
+                  </a:ext>
+                </a:extLst>
+              </p:cNvPr>
+              <p:cNvSpPr txBox="1">
+                <a:spLocks noRot="1" noChangeAspect="1" noMove="1" noResize="1" noEditPoints="1" noAdjustHandles="1" noChangeArrowheads="1" noChangeShapeType="1" noTextEdit="1"/>
+              </p:cNvSpPr>
+              <p:nvPr/>
+            </p:nvSpPr>
+            <p:spPr>
+              <a:xfrm>
+                <a:off x="725168" y="5637524"/>
+                <a:ext cx="1095427" cy="615553"/>
+              </a:xfrm>
+              <a:prstGeom prst="rect">
+                <a:avLst/>
+              </a:prstGeom>
+              <a:blipFill>
+                <a:blip r:embed="rId19"/>
+                <a:stretch>
+                  <a:fillRect/>
+                </a:stretch>
+              </a:blipFill>
+            </p:spPr>
+            <p:txBody>
+              <a:bodyPr/>
+              <a:lstStyle/>
+              <a:p>
+                <a:r>
+                  <a:rPr lang="en-GB">
+                    <a:noFill/>
+                  </a:rPr>
+                  <a:t> </a:t>
+                </a:r>
+              </a:p>
+            </p:txBody>
+          </p:sp>
+        </mc:Fallback>
+      </mc:AlternateContent>
+      <mc:AlternateContent xmlns:mc="http://schemas.openxmlformats.org/markup-compatibility/2006" xmlns:a14="http://schemas.microsoft.com/office/drawing/2010/main">
+        <mc:Choice Requires="a14">
+          <p:sp>
+            <p:nvSpPr>
+              <p:cNvPr id="22" name="TextBox 21">
+                <a:extLst>
+                  <a:ext uri="{FF2B5EF4-FFF2-40B4-BE49-F238E27FC236}">
+                    <a16:creationId xmlns:a16="http://schemas.microsoft.com/office/drawing/2014/main" id="{B2887679-58D3-5CA7-E554-F05E3D91F746}"/>
+                  </a:ext>
+                </a:extLst>
+              </p:cNvPr>
+              <p:cNvSpPr txBox="1"/>
+              <p:nvPr/>
+            </p:nvSpPr>
+            <p:spPr>
+              <a:xfrm>
+                <a:off x="5584122" y="5640514"/>
+                <a:ext cx="1285144" cy="615553"/>
+              </a:xfrm>
+              <a:prstGeom prst="rect">
+                <a:avLst/>
+              </a:prstGeom>
+              <a:noFill/>
+            </p:spPr>
+            <p:txBody>
+              <a:bodyPr wrap="square" lIns="0" tIns="0" rIns="0" bIns="0" rtlCol="0">
+                <a:spAutoFit/>
+              </a:bodyPr>
+              <a:lstStyle/>
+              <a:p>
+                <a:pPr/>
+                <a14:m>
+                  <m:oMathPara xmlns:m="http://schemas.openxmlformats.org/officeDocument/2006/math">
+                    <m:oMathParaPr>
+                      <m:jc m:val="centerGroup"/>
+                    </m:oMathParaPr>
+                    <m:oMath xmlns:m="http://schemas.openxmlformats.org/officeDocument/2006/math">
+                      <m:sSub>
+                        <m:sSubPr>
+                          <m:ctrlPr>
+                            <a:rPr lang="en-US" sz="4000" b="1" i="1">
+                              <a:latin typeface="Cambria Math" panose="02040503050406030204" pitchFamily="18" charset="0"/>
+                            </a:rPr>
+                          </m:ctrlPr>
+                        </m:sSubPr>
+                        <m:e>
+                          <m:r>
+                            <a:rPr lang="en-US" sz="4000" b="1" i="1" smtClean="0">
+                              <a:latin typeface="Cambria Math" panose="02040503050406030204" pitchFamily="18" charset="0"/>
+                            </a:rPr>
+                            <m:t>𝑿</m:t>
+                          </m:r>
+                        </m:e>
+                        <m:sub>
+                          <m:r>
+                            <a:rPr lang="en-US" sz="4000" b="1" i="1">
+                              <a:latin typeface="Cambria Math" panose="02040503050406030204" pitchFamily="18" charset="0"/>
+                            </a:rPr>
+                            <m:t>𝒕</m:t>
+                          </m:r>
+                          <m:r>
+                            <a:rPr lang="en-US" sz="4000" b="1" i="1">
+                              <a:latin typeface="Cambria Math" panose="02040503050406030204" pitchFamily="18" charset="0"/>
+                            </a:rPr>
+                            <m:t>−</m:t>
+                          </m:r>
+                          <m:r>
+                            <a:rPr lang="en-US" sz="4000" b="1" i="1">
+                              <a:latin typeface="Cambria Math" panose="02040503050406030204" pitchFamily="18" charset="0"/>
+                            </a:rPr>
+                            <m:t>𝟏</m:t>
+                          </m:r>
+                        </m:sub>
+                      </m:sSub>
+                    </m:oMath>
+                  </m:oMathPara>
+                </a14:m>
+                <a:endParaRPr lang="en-US" sz="4000" b="1" dirty="0"/>
+              </a:p>
+            </p:txBody>
+          </p:sp>
+        </mc:Choice>
+        <mc:Fallback xmlns="">
+          <p:sp>
+            <p:nvSpPr>
+              <p:cNvPr id="22" name="TextBox 21">
+                <a:extLst>
+                  <a:ext uri="{FF2B5EF4-FFF2-40B4-BE49-F238E27FC236}">
+                    <a16:creationId xmlns:a16="http://schemas.microsoft.com/office/drawing/2014/main" id="{B2887679-58D3-5CA7-E554-F05E3D91F746}"/>
+                  </a:ext>
+                </a:extLst>
+              </p:cNvPr>
+              <p:cNvSpPr txBox="1">
+                <a:spLocks noRot="1" noChangeAspect="1" noMove="1" noResize="1" noEditPoints="1" noAdjustHandles="1" noChangeArrowheads="1" noChangeShapeType="1" noTextEdit="1"/>
+              </p:cNvSpPr>
+              <p:nvPr/>
+            </p:nvSpPr>
+            <p:spPr>
+              <a:xfrm>
+                <a:off x="5584122" y="5640514"/>
+                <a:ext cx="1285144" cy="615553"/>
+              </a:xfrm>
+              <a:prstGeom prst="rect">
+                <a:avLst/>
+              </a:prstGeom>
+              <a:blipFill>
+                <a:blip r:embed="rId21"/>
+                <a:stretch>
+                  <a:fillRect/>
+                </a:stretch>
+              </a:blipFill>
+            </p:spPr>
+            <p:txBody>
+              <a:bodyPr/>
+              <a:lstStyle/>
+              <a:p>
+                <a:r>
+                  <a:rPr lang="en-GB">
+                    <a:noFill/>
+                  </a:rPr>
+                  <a:t> </a:t>
+                </a:r>
+              </a:p>
+            </p:txBody>
+          </p:sp>
+        </mc:Fallback>
+      </mc:AlternateContent>
+      <mc:AlternateContent xmlns:mc="http://schemas.openxmlformats.org/markup-compatibility/2006" xmlns:a14="http://schemas.microsoft.com/office/drawing/2010/main">
+        <mc:Choice Requires="a14">
+          <p:sp>
+            <p:nvSpPr>
+              <p:cNvPr id="23" name="TextBox 22">
+                <a:extLst>
+                  <a:ext uri="{FF2B5EF4-FFF2-40B4-BE49-F238E27FC236}">
+                    <a16:creationId xmlns:a16="http://schemas.microsoft.com/office/drawing/2014/main" id="{6F3E68F4-F52E-27F8-0926-29005D1D7313}"/>
+                  </a:ext>
+                </a:extLst>
+              </p:cNvPr>
+              <p:cNvSpPr txBox="1"/>
+              <p:nvPr/>
+            </p:nvSpPr>
+            <p:spPr>
+              <a:xfrm>
+                <a:off x="8100964" y="5666565"/>
+                <a:ext cx="838415" cy="615553"/>
+              </a:xfrm>
+              <a:prstGeom prst="rect">
+                <a:avLst/>
+              </a:prstGeom>
+              <a:noFill/>
+            </p:spPr>
+            <p:txBody>
+              <a:bodyPr wrap="square" lIns="0" tIns="0" rIns="0" bIns="0" rtlCol="0">
+                <a:spAutoFit/>
+              </a:bodyPr>
+              <a:lstStyle/>
+              <a:p>
+                <a:pPr/>
+                <a14:m>
+                  <m:oMathPara xmlns:m="http://schemas.openxmlformats.org/officeDocument/2006/math">
+                    <m:oMathParaPr>
+                      <m:jc m:val="centerGroup"/>
+                    </m:oMathParaPr>
+                    <m:oMath xmlns:m="http://schemas.openxmlformats.org/officeDocument/2006/math">
+                      <m:sSup>
+                        <m:sSupPr>
+                          <m:ctrlPr>
+                            <a:rPr lang="en-US" sz="4000" b="1" i="1">
+                              <a:latin typeface="Cambria Math" panose="02040503050406030204" pitchFamily="18" charset="0"/>
+                            </a:rPr>
+                          </m:ctrlPr>
+                        </m:sSupPr>
+                        <m:e>
+                          <m:r>
+                            <a:rPr lang="en-US" sz="4000" b="1" i="1">
+                              <a:latin typeface="Cambria Math" panose="02040503050406030204" pitchFamily="18" charset="0"/>
+                            </a:rPr>
+                            <m:t>𝑩</m:t>
+                          </m:r>
+                        </m:e>
+                        <m:sup>
+                          <m:r>
+                            <a:rPr lang="en-US" sz="4000" b="1" i="1">
+                              <a:latin typeface="Cambria Math" panose="02040503050406030204" pitchFamily="18" charset="0"/>
+                            </a:rPr>
+                            <m:t>′</m:t>
+                          </m:r>
+                        </m:sup>
+                      </m:sSup>
+                    </m:oMath>
+                  </m:oMathPara>
+                </a14:m>
+                <a:endParaRPr lang="en-US" sz="4000" b="1" dirty="0"/>
+              </a:p>
+            </p:txBody>
+          </p:sp>
+        </mc:Choice>
+        <mc:Fallback xmlns="">
+          <p:sp>
+            <p:nvSpPr>
+              <p:cNvPr id="23" name="TextBox 22">
+                <a:extLst>
+                  <a:ext uri="{FF2B5EF4-FFF2-40B4-BE49-F238E27FC236}">
+                    <a16:creationId xmlns:a16="http://schemas.microsoft.com/office/drawing/2014/main" id="{6F3E68F4-F52E-27F8-0926-29005D1D7313}"/>
+                  </a:ext>
+                </a:extLst>
+              </p:cNvPr>
+              <p:cNvSpPr txBox="1">
+                <a:spLocks noRot="1" noChangeAspect="1" noMove="1" noResize="1" noEditPoints="1" noAdjustHandles="1" noChangeArrowheads="1" noChangeShapeType="1" noTextEdit="1"/>
+              </p:cNvSpPr>
+              <p:nvPr/>
+            </p:nvSpPr>
+            <p:spPr>
+              <a:xfrm>
+                <a:off x="8100964" y="5666565"/>
+                <a:ext cx="838415" cy="615553"/>
+              </a:xfrm>
+              <a:prstGeom prst="rect">
+                <a:avLst/>
+              </a:prstGeom>
+              <a:blipFill>
+                <a:blip r:embed="rId22"/>
+                <a:stretch>
+                  <a:fillRect/>
+                </a:stretch>
+              </a:blipFill>
+            </p:spPr>
+            <p:txBody>
+              <a:bodyPr/>
+              <a:lstStyle/>
+              <a:p>
+                <a:r>
+                  <a:rPr lang="en-GB">
+                    <a:noFill/>
+                  </a:rPr>
+                  <a:t> </a:t>
+                </a:r>
+              </a:p>
+            </p:txBody>
+          </p:sp>
+        </mc:Fallback>
+      </mc:AlternateContent>
+      <mc:AlternateContent xmlns:mc="http://schemas.openxmlformats.org/markup-compatibility/2006" xmlns:a14="http://schemas.microsoft.com/office/drawing/2010/main">
+        <mc:Choice Requires="a14">
+          <p:sp>
+            <p:nvSpPr>
+              <p:cNvPr id="24" name="TextBox 23">
+                <a:extLst>
+                  <a:ext uri="{FF2B5EF4-FFF2-40B4-BE49-F238E27FC236}">
+                    <a16:creationId xmlns:a16="http://schemas.microsoft.com/office/drawing/2014/main" id="{BACC8BD1-EE02-BFA7-D713-E026F877D29F}"/>
+                  </a:ext>
+                </a:extLst>
+              </p:cNvPr>
+              <p:cNvSpPr txBox="1"/>
+              <p:nvPr/>
+            </p:nvSpPr>
+            <p:spPr>
+              <a:xfrm>
+                <a:off x="10564495" y="5663303"/>
+                <a:ext cx="841771" cy="615553"/>
+              </a:xfrm>
+              <a:prstGeom prst="rect">
+                <a:avLst/>
+              </a:prstGeom>
+              <a:noFill/>
+            </p:spPr>
+            <p:txBody>
+              <a:bodyPr wrap="square" lIns="0" tIns="0" rIns="0" bIns="0" rtlCol="0">
+                <a:spAutoFit/>
+              </a:bodyPr>
+              <a:lstStyle/>
+              <a:p>
+                <a:pPr/>
+                <a14:m>
+                  <m:oMathPara xmlns:m="http://schemas.openxmlformats.org/officeDocument/2006/math">
+                    <m:oMathParaPr>
+                      <m:jc m:val="centerGroup"/>
+                    </m:oMathParaPr>
+                    <m:oMath xmlns:m="http://schemas.openxmlformats.org/officeDocument/2006/math">
+                      <m:sSub>
+                        <m:sSubPr>
+                          <m:ctrlPr>
+                            <a:rPr lang="en-US" sz="4000" b="1" i="1" smtClean="0">
+                              <a:latin typeface="Cambria Math" panose="02040503050406030204" pitchFamily="18" charset="0"/>
+                            </a:rPr>
+                          </m:ctrlPr>
+                        </m:sSubPr>
+                        <m:e>
+                          <m:r>
+                            <a:rPr lang="en-US" sz="4000" b="1" i="1">
+                              <a:latin typeface="Cambria Math" panose="02040503050406030204" pitchFamily="18" charset="0"/>
+                            </a:rPr>
+                            <m:t>𝑬</m:t>
+                          </m:r>
+                        </m:e>
+                        <m:sub>
+                          <m:r>
+                            <a:rPr lang="en-US" sz="4000" b="1" i="1">
+                              <a:latin typeface="Cambria Math" panose="02040503050406030204" pitchFamily="18" charset="0"/>
+                            </a:rPr>
+                            <m:t>𝒕</m:t>
+                          </m:r>
+                        </m:sub>
+                      </m:sSub>
+                    </m:oMath>
+                  </m:oMathPara>
+                </a14:m>
+                <a:endParaRPr lang="en-US" sz="4000" b="1" dirty="0"/>
+              </a:p>
+            </p:txBody>
+          </p:sp>
+        </mc:Choice>
+        <mc:Fallback xmlns="">
+          <p:sp>
+            <p:nvSpPr>
+              <p:cNvPr id="24" name="TextBox 23">
+                <a:extLst>
+                  <a:ext uri="{FF2B5EF4-FFF2-40B4-BE49-F238E27FC236}">
+                    <a16:creationId xmlns:a16="http://schemas.microsoft.com/office/drawing/2014/main" id="{BACC8BD1-EE02-BFA7-D713-E026F877D29F}"/>
+                  </a:ext>
+                </a:extLst>
+              </p:cNvPr>
+              <p:cNvSpPr txBox="1">
+                <a:spLocks noRot="1" noChangeAspect="1" noMove="1" noResize="1" noEditPoints="1" noAdjustHandles="1" noChangeArrowheads="1" noChangeShapeType="1" noTextEdit="1"/>
+              </p:cNvSpPr>
+              <p:nvPr/>
+            </p:nvSpPr>
+            <p:spPr>
+              <a:xfrm>
+                <a:off x="10564495" y="5663303"/>
+                <a:ext cx="841771" cy="615553"/>
+              </a:xfrm>
+              <a:prstGeom prst="rect">
+                <a:avLst/>
+              </a:prstGeom>
+              <a:blipFill>
+                <a:blip r:embed="rId23"/>
+                <a:stretch>
+                  <a:fillRect/>
+                </a:stretch>
+              </a:blipFill>
+            </p:spPr>
+            <p:txBody>
+              <a:bodyPr/>
+              <a:lstStyle/>
+              <a:p>
+                <a:r>
+                  <a:rPr lang="en-GB">
+                    <a:noFill/>
+                  </a:rPr>
+                  <a:t> </a:t>
+                </a:r>
+              </a:p>
+            </p:txBody>
+          </p:sp>
+        </mc:Fallback>
+      </mc:AlternateContent>
+      <p:pic>
+        <p:nvPicPr>
+          <p:cNvPr id="5" name="Picture 4">
+            <a:extLst>
+              <a:ext uri="{FF2B5EF4-FFF2-40B4-BE49-F238E27FC236}">
+                <a16:creationId xmlns:a16="http://schemas.microsoft.com/office/drawing/2014/main" id="{194658D8-8534-27BA-88CF-48302BCEB27A}"/>
+              </a:ext>
+            </a:extLst>
+          </p:cNvPr>
+          <p:cNvPicPr>
+            <a:picLocks noChangeAspect="1"/>
+          </p:cNvPicPr>
+          <p:nvPr/>
+        </p:nvPicPr>
+        <p:blipFill>
+          <a:blip r:embed="rId24">
+            <a:extLst>
+              <a:ext uri="{28A0092B-C50C-407E-A947-70E740481C1C}">
+                <a14:useLocalDpi xmlns:a14="http://schemas.microsoft.com/office/drawing/2010/main" val="0"/>
+              </a:ext>
+            </a:extLst>
+          </a:blip>
+          <a:stretch>
+            <a:fillRect/>
+          </a:stretch>
+        </p:blipFill>
+        <p:spPr>
+          <a:xfrm>
+            <a:off x="2365523" y="3289361"/>
+            <a:ext cx="2569382" cy="2569382"/>
+          </a:xfrm>
+          <a:prstGeom prst="rect">
+            <a:avLst/>
+          </a:prstGeom>
+        </p:spPr>
+      </p:pic>
+      <p:sp>
+        <p:nvSpPr>
+          <p:cNvPr id="16" name="TextBox 15">
+            <a:extLst>
+              <a:ext uri="{FF2B5EF4-FFF2-40B4-BE49-F238E27FC236}">
+                <a16:creationId xmlns:a16="http://schemas.microsoft.com/office/drawing/2014/main" id="{69F4E0FA-4254-22E8-4C67-51ADEAD767C9}"/>
+              </a:ext>
+            </a:extLst>
+          </p:cNvPr>
+          <p:cNvSpPr txBox="1"/>
+          <p:nvPr/>
+        </p:nvSpPr>
+        <p:spPr>
+          <a:xfrm>
+            <a:off x="4639132" y="4173728"/>
+            <a:ext cx="547055" cy="707886"/>
+          </a:xfrm>
+          <a:prstGeom prst="rect">
+            <a:avLst/>
+          </a:prstGeom>
+          <a:noFill/>
+        </p:spPr>
+        <p:txBody>
+          <a:bodyPr wrap="square" rtlCol="0">
+            <a:spAutoFit/>
+          </a:bodyPr>
+          <a:lstStyle/>
+          <a:p>
+            <a:r>
+              <a:rPr lang="en-US" sz="4000" dirty="0">
+                <a:latin typeface="Helvetica" panose="020B0604020202020204" pitchFamily="2" charset="0"/>
+              </a:rPr>
+              <a:t>x</a:t>
+            </a:r>
+          </a:p>
+        </p:txBody>
+      </p:sp>
+      <p:sp>
+        <p:nvSpPr>
+          <p:cNvPr id="17" name="TextBox 16">
+            <a:extLst>
+              <a:ext uri="{FF2B5EF4-FFF2-40B4-BE49-F238E27FC236}">
+                <a16:creationId xmlns:a16="http://schemas.microsoft.com/office/drawing/2014/main" id="{542E8C8A-7BD1-8788-BB3E-CE2F1201B2AA}"/>
+              </a:ext>
+            </a:extLst>
+          </p:cNvPr>
+          <p:cNvSpPr txBox="1"/>
+          <p:nvPr/>
+        </p:nvSpPr>
+        <p:spPr>
+          <a:xfrm>
+            <a:off x="2152273" y="4127862"/>
+            <a:ext cx="699012" cy="830997"/>
+          </a:xfrm>
+          <a:prstGeom prst="rect">
+            <a:avLst/>
+          </a:prstGeom>
+          <a:noFill/>
+        </p:spPr>
+        <p:txBody>
+          <a:bodyPr wrap="square" rtlCol="0">
+            <a:spAutoFit/>
+          </a:bodyPr>
+          <a:lstStyle/>
+          <a:p>
+            <a:r>
+              <a:rPr lang="en-US" sz="4800" dirty="0">
+                <a:latin typeface="Helvetica" panose="020B0604020202020204" pitchFamily="2" charset="0"/>
+              </a:rPr>
+              <a:t>=</a:t>
+            </a:r>
+          </a:p>
+        </p:txBody>
+      </p:sp>
+      <mc:AlternateContent xmlns:mc="http://schemas.openxmlformats.org/markup-compatibility/2006" xmlns:a14="http://schemas.microsoft.com/office/drawing/2010/main">
+        <mc:Choice Requires="a14">
+          <p:sp>
+            <p:nvSpPr>
+              <p:cNvPr id="21" name="TextBox 20">
+                <a:extLst>
+                  <a:ext uri="{FF2B5EF4-FFF2-40B4-BE49-F238E27FC236}">
+                    <a16:creationId xmlns:a16="http://schemas.microsoft.com/office/drawing/2014/main" id="{2F423A2B-434F-5DD0-5873-55F1A45CF182}"/>
+                  </a:ext>
+                </a:extLst>
+              </p:cNvPr>
+              <p:cNvSpPr txBox="1"/>
+              <p:nvPr/>
+            </p:nvSpPr>
+            <p:spPr>
+              <a:xfrm>
+                <a:off x="3218597" y="5663304"/>
+                <a:ext cx="778949" cy="615553"/>
+              </a:xfrm>
+              <a:prstGeom prst="rect">
+                <a:avLst/>
+              </a:prstGeom>
+              <a:noFill/>
+            </p:spPr>
+            <p:txBody>
+              <a:bodyPr wrap="square" lIns="0" tIns="0" rIns="0" bIns="0" rtlCol="0">
+                <a:spAutoFit/>
+              </a:bodyPr>
+              <a:lstStyle/>
+              <a:p>
+                <a:pPr/>
+                <a14:m>
+                  <m:oMathPara xmlns:m="http://schemas.openxmlformats.org/officeDocument/2006/math">
+                    <m:oMathParaPr>
+                      <m:jc m:val="centerGroup"/>
+                    </m:oMathParaPr>
+                    <m:oMath xmlns:m="http://schemas.openxmlformats.org/officeDocument/2006/math">
+                      <m:r>
+                        <a:rPr lang="en-US" sz="4000" b="1" i="1">
+                          <a:latin typeface="Cambria Math" panose="02040503050406030204" pitchFamily="18" charset="0"/>
+                        </a:rPr>
+                        <m:t>𝑨</m:t>
+                      </m:r>
+                    </m:oMath>
+                  </m:oMathPara>
+                </a14:m>
+                <a:endParaRPr lang="en-US" sz="4000" b="1" dirty="0"/>
+              </a:p>
+            </p:txBody>
+          </p:sp>
+        </mc:Choice>
+        <mc:Fallback xmlns="">
+          <p:sp>
+            <p:nvSpPr>
+              <p:cNvPr id="21" name="TextBox 20">
+                <a:extLst>
+                  <a:ext uri="{FF2B5EF4-FFF2-40B4-BE49-F238E27FC236}">
+                    <a16:creationId xmlns:a16="http://schemas.microsoft.com/office/drawing/2014/main" id="{2F423A2B-434F-5DD0-5873-55F1A45CF182}"/>
+                  </a:ext>
+                </a:extLst>
+              </p:cNvPr>
+              <p:cNvSpPr txBox="1">
+                <a:spLocks noRot="1" noChangeAspect="1" noMove="1" noResize="1" noEditPoints="1" noAdjustHandles="1" noChangeArrowheads="1" noChangeShapeType="1" noTextEdit="1"/>
+              </p:cNvSpPr>
+              <p:nvPr/>
+            </p:nvSpPr>
+            <p:spPr>
+              <a:xfrm>
+                <a:off x="3218597" y="5663304"/>
+                <a:ext cx="778949" cy="615553"/>
+              </a:xfrm>
+              <a:prstGeom prst="rect">
+                <a:avLst/>
+              </a:prstGeom>
+              <a:blipFill>
+                <a:blip r:embed="rId20"/>
+                <a:stretch>
+                  <a:fillRect/>
+                </a:stretch>
+              </a:blipFill>
+            </p:spPr>
+            <p:txBody>
+              <a:bodyPr/>
+              <a:lstStyle/>
+              <a:p>
+                <a:r>
+                  <a:rPr lang="en-GB">
                     <a:noFill/>
                   </a:rPr>
                   <a:t> </a:t>
@@ -16552,13 +16486,7 @@
                             <a:rPr lang="en-US" sz="2400" i="1">
                               <a:latin typeface="Cambria Math" panose="02040503050406030204" pitchFamily="18" charset="0"/>
                             </a:rPr>
-                            <m:t>−</m:t>
-                          </m:r>
-                          <m:r>
-                            <a:rPr lang="en-US" sz="2400" i="1">
-                              <a:latin typeface="Cambria Math" panose="02040503050406030204" pitchFamily="18" charset="0"/>
-                            </a:rPr>
-                            <m:t>1</m:t>
+                            <m:t>−1</m:t>
                           </m:r>
                         </m:sub>
                       </m:sSub>
@@ -16620,13 +16548,7 @@
                             <a:rPr lang="en-US" sz="2400" i="1">
                               <a:latin typeface="Cambria Math" panose="02040503050406030204" pitchFamily="18" charset="0"/>
                             </a:rPr>
-                            <m:t>−</m:t>
-                          </m:r>
-                          <m:r>
-                            <a:rPr lang="en-US" sz="2400" i="1">
-                              <a:latin typeface="Cambria Math" panose="02040503050406030204" pitchFamily="18" charset="0"/>
-                            </a:rPr>
-                            <m:t>1</m:t>
+                            <m:t>−1</m:t>
                           </m:r>
                         </m:sub>
                       </m:sSub>
@@ -16865,13 +16787,7 @@
                             <a:rPr lang="fr-FR" sz="2400" i="1">
                               <a:latin typeface="Cambria Math" panose="02040503050406030204" pitchFamily="18" charset="0"/>
                             </a:rPr>
-                            <m:t>−</m:t>
-                          </m:r>
-                          <m:r>
-                            <a:rPr lang="fr-FR" sz="2400" i="1">
-                              <a:latin typeface="Cambria Math" panose="02040503050406030204" pitchFamily="18" charset="0"/>
-                            </a:rPr>
-                            <m:t>1</m:t>
+                            <m:t>−1</m:t>
                           </m:r>
                         </m:sub>
                       </m:sSub>
@@ -16933,13 +16849,7 @@
                             <a:rPr lang="fr-FR" sz="2400" i="1">
                               <a:latin typeface="Cambria Math" panose="02040503050406030204" pitchFamily="18" charset="0"/>
                             </a:rPr>
-                            <m:t>−</m:t>
-                          </m:r>
-                          <m:r>
-                            <a:rPr lang="fr-FR" sz="2400" i="1">
-                              <a:latin typeface="Cambria Math" panose="02040503050406030204" pitchFamily="18" charset="0"/>
-                            </a:rPr>
-                            <m:t>1</m:t>
+                            <m:t>−1</m:t>
                           </m:r>
                         </m:sub>
                       </m:sSub>
@@ -17454,13 +17364,7 @@
                                       <a:rPr lang="en-US" sz="2400" i="1">
                                         <a:latin typeface="Cambria Math" panose="02040503050406030204" pitchFamily="18" charset="0"/>
                                       </a:rPr>
-                                      <m:t>−</m:t>
-                                    </m:r>
-                                    <m:r>
-                                      <a:rPr lang="en-US" sz="2400" i="1">
-                                        <a:latin typeface="Cambria Math" panose="02040503050406030204" pitchFamily="18" charset="0"/>
-                                      </a:rPr>
-                                      <m:t>1</m:t>
+                                      <m:t>−1</m:t>
                                     </m:r>
                                   </m:sub>
                                 </m:sSub>
@@ -17495,13 +17399,7 @@
                                       <a:rPr lang="en-US" sz="2400" i="1">
                                         <a:latin typeface="Cambria Math" panose="02040503050406030204" pitchFamily="18" charset="0"/>
                                       </a:rPr>
-                                      <m:t>−</m:t>
-                                    </m:r>
-                                    <m:r>
-                                      <a:rPr lang="en-US" sz="2400" i="1">
-                                        <a:latin typeface="Cambria Math" panose="02040503050406030204" pitchFamily="18" charset="0"/>
-                                      </a:rPr>
-                                      <m:t>1</m:t>
+                                      <m:t>−1</m:t>
                                     </m:r>
                                   </m:sub>
                                 </m:sSub>
